--- a/提交材料/东软智慧云脑诊疗平台项目汇报 (2).pptx
+++ b/提交材料/东软智慧云脑诊疗平台项目汇报 (2).pptx
@@ -17357,6 +17357,61 @@
           </a:p>
         </p:txBody>
       </p:sp>
+      <p:sp>
+        <p:nvSpPr>
+          <p:cNvPr id="22" name="文本框 21"/>
+          <p:cNvSpPr txBox="1"/>
+          <p:nvPr/>
+        </p:nvSpPr>
+        <p:spPr>
+          <a:xfrm>
+            <a:off x="5629910" y="6413500"/>
+            <a:ext cx="7903845" cy="368300"/>
+          </a:xfrm>
+          <a:prstGeom prst="rect">
+            <a:avLst/>
+          </a:prstGeom>
+          <a:noFill/>
+        </p:spPr>
+        <p:txBody>
+          <a:bodyPr wrap="square" rtlCol="0">
+            <a:spAutoFit/>
+          </a:bodyPr>
+          <a:p>
+            <a:r>
+              <a:rPr lang="en-US" sz="1800">
+                <a:solidFill>
+                  <a:srgbClr val="525252"/>
+                </a:solidFill>
+                <a:latin typeface="Noto Sans SC" panose="020B0200000000000000" charset="-122"/>
+                <a:ea typeface="Noto Sans SC" panose="020B0200000000000000" charset="-122"/>
+                <a:cs typeface="Noto Sans SC" panose="020B0200000000000000" charset="-122"/>
+              </a:rPr>
+              <a:t>组长：彭佳成      组员：周栩乐、 吴皓睿、 王选默、</a:t>
+            </a:r>
+            <a:r>
+              <a:rPr lang="en-US" sz="1800">
+                <a:solidFill>
+                  <a:srgbClr val="525252"/>
+                </a:solidFill>
+                <a:latin typeface="Noto Sans SC" panose="020B0200000000000000" charset="-122"/>
+                <a:ea typeface="Noto Sans SC" panose="020B0200000000000000" charset="-122"/>
+                <a:cs typeface="Noto Sans SC" panose="020B0200000000000000" charset="-122"/>
+                <a:sym typeface="+mn-ea"/>
+              </a:rPr>
+              <a:t>吴振凯</a:t>
+            </a:r>
+            <a:endParaRPr lang="en-US" sz="1800">
+              <a:solidFill>
+                <a:srgbClr val="525252"/>
+              </a:solidFill>
+              <a:latin typeface="Noto Sans SC" panose="020B0200000000000000" charset="-122"/>
+              <a:ea typeface="Noto Sans SC" panose="020B0200000000000000" charset="-122"/>
+              <a:cs typeface="Noto Sans SC" panose="020B0200000000000000" charset="-122"/>
+            </a:endParaRPr>
+          </a:p>
+        </p:txBody>
+      </p:sp>
     </p:spTree>
   </p:cSld>
   <p:clrMapOvr>
